--- a/decks/hist-slave-trade/hist-slave-trade_ch1_why-it-began.pptx
+++ b/decks/hist-slave-trade/hist-slave-trade_ch1_why-it-began.pptx
@@ -128,31 +128,31 @@
   <p:extLst>
     <p:ext uri="{521415D9-36F7-43E2-AB2F-B90AF26B5E84}">
       <p14:sectionLst xmlns:p14="http://schemas.microsoft.com/office/powerpoint/2010/main">
-        <p14:section name="Opening" id="{3440e4b1-88f6-c215-090f-8a12625904fa}">
+        <p14:section name="Opening" id="{e64b23bd-3019-2475-4669-c03ca134c7a5}">
           <p14:sldIdLst>
             <p14:sldId id="256"/>
           </p14:sldIdLst>
         </p14:section>
-        <p14:section name="Gate" id="{9a1c27e5-650e-e2c5-0065-513a3af1b8cf}">
+        <p14:section name="Gate" id="{4b88a818-2ab2-a8d3-af9d-c5cecfdfd3e3}">
           <p14:sldIdLst>
             <p14:sldId id="257"/>
             <p14:sldId id="258"/>
             <p14:sldId id="259"/>
           </p14:sldIdLst>
         </p14:section>
-        <p14:section name="Pre-teach" id="{012bc489-0fcd-87b0-56b3-0e2e8e166a46}">
+        <p14:section name="Pre-teach" id="{c0525dfe-e852-b725-14b6-90449df8cf7b}">
           <p14:sldIdLst>
             <p14:sldId id="260"/>
             <p14:sldId id="261"/>
           </p14:sldIdLst>
         </p14:section>
-        <p14:section name="Read-along" id="{e15292a5-17dd-1f6d-211a-0195687315e0}">
+        <p14:section name="Read-along" id="{742150d5-adb9-b235-d1de-7f3895f5012e}">
           <p14:sldIdLst>
             <p14:sldId id="262"/>
             <p14:sldId id="263"/>
           </p14:sldIdLst>
         </p14:section>
-        <p14:section name="Teach" id="{df2b613e-25f3-ff68-fcd5-ffc4a7272628}">
+        <p14:section name="Teach" id="{7924fd77-8726-c0af-f6a9-dc29e43b33b8}">
           <p14:sldIdLst>
             <p14:sldId id="264"/>
             <p14:sldId id="265"/>
@@ -162,7 +162,7 @@
             <p14:sldId id="269"/>
           </p14:sldIdLst>
         </p14:section>
-        <p14:section name="Routes" id="{64e87456-ce85-0c50-74c2-e887ed32a6d5}">
+        <p14:section name="Routes" id="{763e03f2-000f-7c3f-3aaa-82a3d93694ee}">
           <p14:sldIdLst>
             <p14:sldId id="270"/>
             <p14:sldId id="271"/>
@@ -170,12 +170,12 @@
             <p14:sldId id="273"/>
           </p14:sldIdLst>
         </p14:section>
-        <p14:section name="Close" id="{51ea2e15-df36-f103-2e5e-9d9d319a8db3}">
+        <p14:section name="Close" id="{efbefbf3-beb6-7509-b55d-b68b8b1bc44e}">
           <p14:sldIdLst>
             <p14:sldId id="274"/>
           </p14:sldIdLst>
         </p14:section>
-        <p14:section name="Answers" id="{bbf4468c-c2c4-5fe6-1e72-814200e9e67b}">
+        <p14:section name="Answers" id="{d1066a1b-4e4b-a25e-33c0-018b1bac1337}">
           <p14:sldIdLst>
             <p14:sldId id="275"/>
             <p14:sldId id="276"/>
@@ -1515,7 +1515,7 @@
               <a:rPr lang="en-US" dirty="0"/>
               <a:t>Exit ticket — individual, silent, on a slip or mini-whiteboard. Recall before help: no notes, no lanes, no hints. Collect before pupils leave.
 Question: Which of these is a LONG-term impact of the Slave Trade on Africa?
-Answer: A   Some African economies came to rely on the trade, so when it ended they became poorer. Long-term impacts outlast the events that caused them. Reliance on the trade, and the poverty that followed its end, lasted for generations; raids, purchases and voyages were single events.
+Answer: B   Some African economies came to rely on the trade, so when it ended they became poorer. Long-term impacts outlast the events that caused them. Reliance on the trade, and the poverty that followed its end, lasted for generations; raids, purchases and voyages were single events.
 Source of this question: module 3 task ("Short-term or long-term?") from the manifest.
 Sort the slips: correct → ready to move on; incorrect → start next lesson in the pre-teach group, with the read-along and the Support lane. Same destination next time.</a:t>
             </a:r>
@@ -1606,7 +1606,7 @@
             <a:r>
               <a:rPr lang="en-US" dirty="0"/>
               <a:t>Do now — retrieval. Silent, no notes, no help: recall comes before any support. Give about four minutes.
-1. What does the word slavery mean?  →  A   Owning people as property and forcing them to work for nothing
+1. What does the word slavery mean?  →  C   Owning people as property and forcing them to work for nothing
 2. Europeans wanted more workers because many ___ people in the Americas had died from European diseases.  →  native
 3. Which of these was a reason the Slave Trade began?  →  A   Europeans wanted workers for sugar, tobacco and cotton plantations
 Circulate: who gets 3/3 (Stretch route), 2/3 (Core), 0–1 (Support)? Use this to route pupils later in the lesson.</a:t>
@@ -1882,7 +1882,7 @@
             <a:r>
               <a:rPr lang="en-US" dirty="0"/>
               <a:t>Answers — exit ticket: Exit ticket. Reveal the answer; pupils mark their own work in a different colour, then read the "why" together. Same destination for every lane, so one answer serves the whole class.
-Answer: A   Some African economies came to rely on the trade, so when it ended they became poorer
+Answer: B   Some African economies came to rely on the trade, so when it ended they became poorer
 Why: Long-term impacts outlast the events that caused them. Reliance on the trade, and the poverty that followed its end, lasted for generations; raids, purchases and voyages were single events.
 Ask a Support pupil to explain one step, and a Stretch pupil to share their extension.</a:t>
             </a:r>
@@ -1973,7 +1973,7 @@
             <a:r>
               <a:rPr lang="en-US" dirty="0"/>
               <a:t>Do now — retrieval. Silent, no notes, no help: recall comes before any support. Give about four minutes.
-1. What does the word slavery mean?  →  A   Owning people as property and forcing them to work for nothing
+1. What does the word slavery mean?  →  C   Owning people as property and forcing them to work for nothing
 2. Europeans wanted more workers because many ___ people in the Americas had died from European diseases.  →  native
 3. Which of these was a reason the Slave Trade began?  →  A   Europeans wanted workers for sugar, tobacco and cotton plantations
 Circulate: who gets 3/3 (Stretch route), 2/3 (Core), 0–1 (Support)? Use this to route pupils later in the lesson.</a:t>
@@ -2065,7 +2065,7 @@
             <a:r>
               <a:rPr lang="en-US" dirty="0"/>
               <a:t>Answers — pupils mark their own in a different colour, then hands up for 3/3, 2/3, 1/3.
-1. A   Owning people as property and forcing them to work for nothing. Slavery is ownership: a person is treated as property, bought and sold, and made to work for nothing.
+1. C   Owning people as property and forcing them to work for nothing. Slavery is ownership: a person is treated as property, bought and sold, and made to work for nothing.
 2. native. The native populations of the Americas died in huge numbers from diseases the Europeans brought, so the Europeans looked for workers elsewhere.
 3. A   Europeans wanted workers for sugar, tobacco and cotton plantations. The trade began because European empires wanted more workers and more luxury crops: sugar, tobacco and cotton.
 Say the route each score points to: 3/3 Stretch, 2/3 Core, 0–1 Support. Pupils may choose to move up.</a:t>
@@ -10391,7 +10391,7 @@
                 <a:ea typeface="Calibri" pitchFamily="34" charset="-122"/>
                 <a:cs typeface="Calibri" pitchFamily="34" charset="-120"/>
               </a:rPr>
-              <a:t>Some African economies came to rely on the trade, so when it ended they became poorer</a:t>
+              <a:t>A kingdom bought guns from European traders one summer</a:t>
             </a:r>
             <a:endParaRPr lang="en-US" sz="2400" dirty="0"/>
           </a:p>
@@ -10428,7 +10428,7 @@
                 <a:ea typeface="Calibri" pitchFamily="34" charset="-122"/>
                 <a:cs typeface="Calibri" pitchFamily="34" charset="-120"/>
               </a:rPr>
-              <a:t>A village was raided and its people were taken in one night</a:t>
+              <a:t>Some African economies came to rely on the trade, so when it ended they became poorer</a:t>
             </a:r>
             <a:endParaRPr lang="en-US" sz="2400" dirty="0"/>
           </a:p>
@@ -10465,7 +10465,7 @@
                 <a:ea typeface="Calibri" pitchFamily="34" charset="-122"/>
                 <a:cs typeface="Calibri" pitchFamily="34" charset="-120"/>
               </a:rPr>
-              <a:t>A kingdom bought guns from European traders one summer</a:t>
+              <a:t>A village was raided and its people were taken in one night</a:t>
             </a:r>
             <a:endParaRPr lang="en-US" sz="2400" dirty="0"/>
           </a:p>
@@ -10982,7 +10982,7 @@
                 <a:ea typeface="Calibri" pitchFamily="34" charset="-122"/>
                 <a:cs typeface="Calibri" pitchFamily="34" charset="-120"/>
               </a:rPr>
-              <a:t>Owning people as property and forcing them to work for nothing</a:t>
+              <a:t>Sending prisoners to another country for a fixed number of years</a:t>
             </a:r>
             <a:endParaRPr lang="en-US" sz="2200" dirty="0"/>
           </a:p>
@@ -11056,7 +11056,7 @@
                 <a:ea typeface="Calibri" pitchFamily="34" charset="-122"/>
                 <a:cs typeface="Calibri" pitchFamily="34" charset="-120"/>
               </a:rPr>
-              <a:t>Sending prisoners to another country for a fixed number of years</a:t>
+              <a:t>Owning people as property and forcing them to work for nothing</a:t>
             </a:r>
             <a:endParaRPr lang="en-US" sz="2200" dirty="0"/>
           </a:p>
@@ -12902,7 +12902,7 @@
                 <a:ea typeface="Cambria" pitchFamily="34" charset="-122"/>
                 <a:cs typeface="Cambria" pitchFamily="34" charset="-120"/>
               </a:rPr>
-              <a:t>A   Some African economies came to rely on the trade, so when it ended they became poorer</a:t>
+              <a:t>B   Some African economies came to rely on the trade, so when it ended they became poorer</a:t>
             </a:r>
             <a:endParaRPr lang="en-US" sz="1800" dirty="0"/>
           </a:p>
@@ -13510,7 +13510,7 @@
                 <a:ea typeface="Calibri" pitchFamily="34" charset="-122"/>
                 <a:cs typeface="Calibri" pitchFamily="34" charset="-120"/>
               </a:rPr>
-              <a:t>African kingdoms asked Europe to take their people away</a:t>
+              <a:t>Europeans wanted to teach new farming methods in the Americas</a:t>
             </a:r>
             <a:endParaRPr lang="en-US" sz="2400" dirty="0"/>
           </a:p>
@@ -13547,7 +13547,7 @@
                 <a:ea typeface="Calibri" pitchFamily="34" charset="-122"/>
                 <a:cs typeface="Calibri" pitchFamily="34" charset="-120"/>
               </a:rPr>
-              <a:t>Europeans wanted to teach new farming methods in the Americas</a:t>
+              <a:t>African kingdoms asked Europe to take their people away</a:t>
             </a:r>
             <a:endParaRPr lang="en-US" sz="2400" dirty="0"/>
           </a:p>
@@ -13948,7 +13948,7 @@
                 <a:ea typeface="Calibri" pitchFamily="34" charset="-122"/>
                 <a:cs typeface="Calibri" pitchFamily="34" charset="-120"/>
               </a:rPr>
-              <a:t>A   Owning people as property and forcing them to work for nothing</a:t>
+              <a:t>C   Owning people as property and forcing them to work for nothing</a:t>
             </a:r>
             <a:endParaRPr lang="en-US" sz="2200" dirty="0"/>
           </a:p>

--- a/decks/hist-slave-trade/hist-slave-trade_ch1_why-it-began.pptx
+++ b/decks/hist-slave-trade/hist-slave-trade_ch1_why-it-began.pptx
@@ -128,31 +128,31 @@
   <p:extLst>
     <p:ext uri="{521415D9-36F7-43E2-AB2F-B90AF26B5E84}">
       <p14:sectionLst xmlns:p14="http://schemas.microsoft.com/office/powerpoint/2010/main">
-        <p14:section name="Opening" id="{e64b23bd-3019-2475-4669-c03ca134c7a5}">
+        <p14:section name="Opening" id="{a69e3daf-6b21-2f10-0114-67f1243d110d}">
           <p14:sldIdLst>
             <p14:sldId id="256"/>
           </p14:sldIdLst>
         </p14:section>
-        <p14:section name="Gate" id="{4b88a818-2ab2-a8d3-af9d-c5cecfdfd3e3}">
+        <p14:section name="Gate" id="{e4efdb7a-043b-c787-f720-3d655738382c}">
           <p14:sldIdLst>
             <p14:sldId id="257"/>
             <p14:sldId id="258"/>
             <p14:sldId id="259"/>
           </p14:sldIdLst>
         </p14:section>
-        <p14:section name="Pre-teach" id="{c0525dfe-e852-b725-14b6-90449df8cf7b}">
+        <p14:section name="Pre-teach" id="{f11099b4-4fac-e78c-18bb-4eb17ffa9ad9}">
           <p14:sldIdLst>
             <p14:sldId id="260"/>
             <p14:sldId id="261"/>
           </p14:sldIdLst>
         </p14:section>
-        <p14:section name="Read-along" id="{742150d5-adb9-b235-d1de-7f3895f5012e}">
+        <p14:section name="Read-along" id="{9becea14-ff53-6e6c-a610-cf6342cfdf9f}">
           <p14:sldIdLst>
             <p14:sldId id="262"/>
             <p14:sldId id="263"/>
           </p14:sldIdLst>
         </p14:section>
-        <p14:section name="Teach" id="{7924fd77-8726-c0af-f6a9-dc29e43b33b8}">
+        <p14:section name="Teach" id="{2e24bacc-5fd5-c7a2-11d1-b0532b90782d}">
           <p14:sldIdLst>
             <p14:sldId id="264"/>
             <p14:sldId id="265"/>
@@ -162,7 +162,7 @@
             <p14:sldId id="269"/>
           </p14:sldIdLst>
         </p14:section>
-        <p14:section name="Routes" id="{763e03f2-000f-7c3f-3aaa-82a3d93694ee}">
+        <p14:section name="Routes" id="{401c8982-57da-28d6-87b5-0674e985bc58}">
           <p14:sldIdLst>
             <p14:sldId id="270"/>
             <p14:sldId id="271"/>
@@ -170,12 +170,12 @@
             <p14:sldId id="273"/>
           </p14:sldIdLst>
         </p14:section>
-        <p14:section name="Close" id="{efbefbf3-beb6-7509-b55d-b68b8b1bc44e}">
+        <p14:section name="Close" id="{16373f96-485c-b6c2-85b0-c9a9fe7aa3e5}">
           <p14:sldIdLst>
             <p14:sldId id="274"/>
           </p14:sldIdLst>
         </p14:section>
-        <p14:section name="Answers" id="{d1066a1b-4e4b-a25e-33c0-018b1bac1337}">
+        <p14:section name="Answers" id="{a29dc0fd-8728-890a-17b5-d2e87e01180d}">
           <p14:sldIdLst>
             <p14:sldId id="275"/>
             <p14:sldId id="276"/>
